--- a/docs/PARAKH-SIH2026-idea.pptx
+++ b/docs/PARAKH-SIH2026-idea.pptx
@@ -5565,7 +5565,7 @@
                 <a:latin typeface="Times New Roman" panose="02020603050405020304" pitchFamily="18" charset="0"/>
                 <a:cs typeface="Times New Roman" panose="02020603050405020304" pitchFamily="18" charset="0"/>
               </a:rPr>
-              <a:t>TITLE PAGE</a:t>
+              <a:t>DOOM</a:t>
             </a:r>
             <a:endParaRPr lang="en-IN" b="1" dirty="0">
               <a:solidFill>
@@ -5684,7 +5684,7 @@
           <a:p>
             <a:pPr algn="l" marL="171450" indent="-171450">
               <a:spcBef>
-                <a:spcPts val="900"/>
+                <a:spcPts val="800"/>
               </a:spcBef>
               <a:buFont typeface="Arial"/>
               <a:buChar char="•"/>
@@ -5703,7 +5703,7 @@
           <a:p>
             <a:pPr algn="l" marL="171450" indent="-171450">
               <a:spcBef>
-                <a:spcPts val="900"/>
+                <a:spcPts val="800"/>
               </a:spcBef>
               <a:buFont typeface="Arial"/>
               <a:buChar char="•"/>
@@ -5722,26 +5722,26 @@
           <a:p>
             <a:pPr algn="l" marL="171450" indent="-171450">
               <a:spcBef>
-                <a:spcPts val="900"/>
+                <a:spcPts val="800"/>
               </a:spcBef>
               <a:buFont typeface="Arial"/>
               <a:buChar char="•"/>
             </a:pPr>
             <a:r>
-              <a:rPr lang="en-US" sz="1400" b="1" i="0" dirty="0">
-                <a:solidFill>
-                  <a:srgbClr val="B45309"/>
-                </a:solidFill>
-                <a:latin typeface="Arial"/>
-                <a:cs typeface="Arial"/>
-              </a:rPr>
-              <a:t>Theme – &lt;&lt;fill from the SIH portal&gt;&gt;</a:t>
+              <a:rPr lang="en-US" sz="1200" b="1" i="0" dirty="0">
+                <a:solidFill>
+                  <a:srgbClr val="334155"/>
+                </a:solidFill>
+                <a:latin typeface="Arial"/>
+                <a:cs typeface="Arial"/>
+              </a:rPr>
+              <a:t>Theme – Development of an AI powered system to detect anomalies, fraud, and inefficiencies in MPLAD Scheme implementation regd.</a:t>
             </a:r>
           </a:p>
           <a:p>
             <a:pPr algn="l" marL="171450" indent="-171450">
               <a:spcBef>
-                <a:spcPts val="900"/>
+                <a:spcPts val="800"/>
               </a:spcBef>
               <a:buFont typeface="Arial"/>
               <a:buChar char="•"/>
@@ -5760,7 +5760,7 @@
           <a:p>
             <a:pPr algn="l" marL="171450" indent="-171450">
               <a:spcBef>
-                <a:spcPts val="900"/>
+                <a:spcPts val="800"/>
               </a:spcBef>
               <a:buFont typeface="Arial"/>
               <a:buChar char="•"/>
@@ -5768,18 +5768,18 @@
             <a:r>
               <a:rPr lang="en-US" sz="1400" b="1" i="0" dirty="0">
                 <a:solidFill>
-                  <a:srgbClr val="B45309"/>
-                </a:solidFill>
-                <a:latin typeface="Arial"/>
-                <a:cs typeface="Arial"/>
-              </a:rPr>
-              <a:t>Team ID – &lt;&lt;fill from the SIH portal&gt;&gt;</a:t>
+                  <a:srgbClr val="334155"/>
+                </a:solidFill>
+                <a:latin typeface="Arial"/>
+                <a:cs typeface="Arial"/>
+              </a:rPr>
+              <a:t>Team ID – 415</a:t>
             </a:r>
           </a:p>
           <a:p>
             <a:pPr algn="l" marL="171450" indent="-171450">
               <a:spcBef>
-                <a:spcPts val="900"/>
+                <a:spcPts val="800"/>
               </a:spcBef>
               <a:buFont typeface="Arial"/>
               <a:buChar char="•"/>
@@ -5787,12 +5787,12 @@
             <a:r>
               <a:rPr lang="en-US" sz="1400" b="1" i="0" dirty="0">
                 <a:solidFill>
-                  <a:srgbClr val="B45309"/>
-                </a:solidFill>
-                <a:latin typeface="Arial"/>
-                <a:cs typeface="Arial"/>
-              </a:rPr>
-              <a:t>Team Name – &lt;&lt;registered team name&gt;&gt;</a:t>
+                  <a:srgbClr val="334155"/>
+                </a:solidFill>
+                <a:latin typeface="Arial"/>
+                <a:cs typeface="Arial"/>
+              </a:rPr>
+              <a:t>Team Name – DOOM</a:t>
             </a:r>
           </a:p>
         </p:txBody>
@@ -8068,7 +8068,7 @@
                 <a:latin typeface="Arial"/>
                 <a:cs typeface="Arial"/>
               </a:rPr>
-              <a:t>Raw CSV → Parquet → DuckDB is one command and a few seconds. The same input always yields the same flags, so any reviewer can re-run the pipeline and reproduce every number. 172 automated tests cover the detectors, the validation methods and the restraint rules themselves.</a:t>
+              <a:t>Raw CSV → Parquet → DuckDB is one command and a few seconds. The same input always yields the same flags, so any reviewer can re-run the pipeline and reproduce every number. 175 automated tests cover the detectors, the validation methods and the restraint rules themselves.</a:t>
             </a:r>
           </a:p>
         </p:txBody>
@@ -8655,7 +8655,7 @@
                 <a:latin typeface="Arial"/>
                 <a:cs typeface="Arial"/>
               </a:rPr>
-              <a:t>172 automated tests, including the restraint guarantees</a:t>
+              <a:t>175 automated tests, including the restraint guarantees</a:t>
             </a:r>
           </a:p>
         </p:txBody>
@@ -10045,7 +10045,7 @@
                 <a:latin typeface="Arial"/>
                 <a:cs typeface="Arial"/>
               </a:rPr>
-              <a:t>37,701 works flagged with evidence attached</a:t>
+              <a:t>37,566 works flagged with evidence attached</a:t>
             </a:r>
           </a:p>
           <a:p>
@@ -10064,7 +10064,7 @@
                 <a:latin typeface="Arial"/>
                 <a:cs typeface="Arial"/>
               </a:rPr>
-              <a:t>60,339 examined by every detector and cleared</a:t>
+              <a:t>60,474 examined by every detector and cleared</a:t>
             </a:r>
           </a:p>
           <a:p>
@@ -11359,7 +11359,7 @@
                 <a:latin typeface="Arial"/>
                 <a:cs typeface="Arial"/>
               </a:rPr>
-              <a:t>github.com/Kartik-Garg-13/mplad_sih  —  the full pipeline, the 13 detectors, the five validation methods and 172 tests. Clone it, run two commands, and every figure in this deck rebuilds from the published source data.</a:t>
+              <a:t>github.com/Kartik-Garg-13/mplad_sih  —  the full pipeline, the 13 detectors, the five validation methods and 175 tests. Clone it, run two commands, and every figure in this deck rebuilds from the published source data.</a:t>
             </a:r>
           </a:p>
         </p:txBody>
